--- a/HueveraMarketing/Super Blanco 100 - Link 1200x628.pptx
+++ b/HueveraMarketing/Super Blanco 100 - Link 1200x628.pptx
@@ -3084,7 +3084,7 @@
     <p:bg>
       <p:bgPr>
         <a:solidFill>
-          <a:srgbClr val="FFFFFF"/>
+          <a:srgbClr val="F5C13F"/>
         </a:solidFill>
         <a:effectLst/>
       </p:bgPr>
@@ -3098,7 +3098,7 @@
       <p:grpSpPr/>
       <p:pic>
         <p:nvPicPr>
-          <p:cNvPr id="2" name="Picture 1" descr="sb_wide.png"/>
+          <p:cNvPr id="2" name="Picture 1" descr="sb_wide_r4540910x4572000_center.png"/>
           <p:cNvPicPr>
             <a:picLocks noChangeAspect="1"/>
           </p:cNvPicPr>
@@ -3112,8 +3112,8 @@
         </p:blipFill>
         <p:spPr>
           <a:xfrm>
-            <a:off x="0" y="-150982"/>
-            <a:ext cx="8732520" cy="4873964"/>
+            <a:off x="0" y="0"/>
+            <a:ext cx="4540910" cy="4572000"/>
           </a:xfrm>
           <a:prstGeom prst="rect">
             <a:avLst/>
@@ -3122,57 +3122,13 @@
       </p:pic>
       <p:sp>
         <p:nvSpPr>
-          <p:cNvPr id="3" name="Rectangle 2"/>
+          <p:cNvPr id="3" name="Rounded Rectangle 2"/>
           <p:cNvSpPr/>
           <p:nvPr/>
         </p:nvSpPr>
         <p:spPr>
           <a:xfrm>
-            <a:off x="0" y="2057400"/>
-            <a:ext cx="8732520" cy="2514600"/>
-          </a:xfrm>
-          <a:prstGeom prst="rect">
-            <a:avLst/>
-          </a:prstGeom>
-          <a:solidFill>
-            <a:srgbClr val="F5C13F"/>
-          </a:solidFill>
-          <a:ln>
-            <a:noFill/>
-          </a:ln>
-          <a:effectLst/>
-        </p:spPr>
-        <p:style>
-          <a:lnRef idx="1">
-            <a:schemeClr val="accent1"/>
-          </a:lnRef>
-          <a:fillRef idx="3">
-            <a:schemeClr val="accent1"/>
-          </a:fillRef>
-          <a:effectRef idx="2">
-            <a:schemeClr val="accent1"/>
-          </a:effectRef>
-          <a:fontRef idx="minor">
-            <a:schemeClr val="lt1"/>
-          </a:fontRef>
-        </p:style>
-        <p:txBody>
-          <a:bodyPr rtlCol="0" anchor="ctr"/>
-          <a:lstStyle/>
-          <a:p>
-            <a:pPr algn="ctr"/>
-          </a:p>
-        </p:txBody>
-      </p:sp>
-      <p:sp>
-        <p:nvSpPr>
-          <p:cNvPr id="4" name="Rounded Rectangle 3"/>
-          <p:cNvSpPr/>
-          <p:nvPr/>
-        </p:nvSpPr>
-        <p:spPr>
-          <a:xfrm>
-            <a:off x="777240" y="777240"/>
+            <a:off x="5043830" y="822960"/>
             <a:ext cx="3024378" cy="373380"/>
           </a:xfrm>
           <a:prstGeom prst="roundRect">
@@ -3221,14 +3177,14 @@
       </p:sp>
       <p:sp>
         <p:nvSpPr>
-          <p:cNvPr id="5" name="TextBox 4"/>
+          <p:cNvPr id="4" name="TextBox 3"/>
           <p:cNvSpPr txBox="1"/>
           <p:nvPr/>
         </p:nvSpPr>
         <p:spPr>
           <a:xfrm>
-            <a:off x="777240" y="2468880"/>
-            <a:ext cx="7178040" cy="1245108"/>
+            <a:off x="5043830" y="1481328"/>
+            <a:ext cx="2911450" cy="1721358"/>
           </a:xfrm>
           <a:prstGeom prst="rect">
             <a:avLst/>
@@ -3260,14 +3216,14 @@
       </p:sp>
       <p:sp>
         <p:nvSpPr>
-          <p:cNvPr id="6" name="TextBox 5"/>
+          <p:cNvPr id="5" name="TextBox 4"/>
           <p:cNvSpPr txBox="1"/>
           <p:nvPr/>
         </p:nvSpPr>
         <p:spPr>
           <a:xfrm>
-            <a:off x="777240" y="3842004"/>
-            <a:ext cx="7178040" cy="502920"/>
+            <a:off x="5043830" y="3202686"/>
+            <a:ext cx="2911450" cy="1534159"/>
           </a:xfrm>
           <a:prstGeom prst="rect">
             <a:avLst/>
@@ -3282,17 +3238,17 @@
           <a:p>
             <a:pPr algn="l">
               <a:lnSpc>
-                <a:spcPct val="100000"/>
+                <a:spcPct val="110000"/>
               </a:lnSpc>
             </a:pPr>
             <a:r>
-              <a:rPr sz="2200" b="1">
+              <a:rPr sz="2200" b="0">
                 <a:solidFill>
                   <a:srgbClr val="14181F"/>
                 </a:solidFill>
-                <a:latin typeface="Bricolage Grotesque"/>
+                <a:latin typeface="Hanken Grotesk"/>
               </a:rPr>
-              <a:t>Pídela en huevera.cl</a:t>
+              <a:t>5 bandejas de 20 huevos. · huevera.cl</a:t>
             </a:r>
           </a:p>
         </p:txBody>

--- a/HueveraMarketing/Super Blanco 100 - Link 1200x628.pptx
+++ b/HueveraMarketing/Super Blanco 100 - Link 1200x628.pptx
@@ -3098,7 +3098,7 @@
       <p:grpSpPr/>
       <p:pic>
         <p:nvPicPr>
-          <p:cNvPr id="2" name="Picture 1" descr="sb_wide_r4540910x4572000_center.png"/>
+          <p:cNvPr id="2" name="Picture 1" descr="sb_wide_r3667658x4572000_center.png"/>
           <p:cNvPicPr>
             <a:picLocks noChangeAspect="1"/>
           </p:cNvPicPr>
@@ -3113,7 +3113,7 @@
         <p:spPr>
           <a:xfrm>
             <a:off x="0" y="0"/>
-            <a:ext cx="4540910" cy="4572000"/>
+            <a:ext cx="3667658" cy="4572000"/>
           </a:xfrm>
           <a:prstGeom prst="rect">
             <a:avLst/>
@@ -3128,7 +3128,7 @@
         </p:nvSpPr>
         <p:spPr>
           <a:xfrm>
-            <a:off x="5043830" y="822960"/>
+            <a:off x="4170578" y="822960"/>
             <a:ext cx="3024378" cy="373380"/>
           </a:xfrm>
           <a:prstGeom prst="roundRect">
@@ -3183,8 +3183,8 @@
         </p:nvSpPr>
         <p:spPr>
           <a:xfrm>
-            <a:off x="5043830" y="1481328"/>
-            <a:ext cx="2911450" cy="1721358"/>
+            <a:off x="4170578" y="1481328"/>
+            <a:ext cx="3784702" cy="1118108"/>
           </a:xfrm>
           <a:prstGeom prst="rect">
             <a:avLst/>
@@ -3203,7 +3203,7 @@
               </a:lnSpc>
             </a:pPr>
             <a:r>
-              <a:rPr sz="3000" b="1">
+              <a:rPr sz="2600" b="1">
                 <a:solidFill>
                   <a:srgbClr val="14181F"/>
                 </a:solidFill>
@@ -3222,8 +3222,8 @@
         </p:nvSpPr>
         <p:spPr>
           <a:xfrm>
-            <a:off x="5043830" y="3202686"/>
-            <a:ext cx="2911450" cy="1534159"/>
+            <a:off x="4170578" y="2599436"/>
+            <a:ext cx="3784702" cy="2581910"/>
           </a:xfrm>
           <a:prstGeom prst="rect">
             <a:avLst/>
@@ -3248,7 +3248,10 @@
                 </a:solidFill>
                 <a:latin typeface="Hanken Grotesk"/>
               </a:rPr>
-              <a:t>5 bandejas de 20 huevos. · huevera.cl</a:t>
+              <a:t>• 1er despacho gratis
+• Antes de 8:30, llega hoy
+• Refiere y gana $1.000
+huevera.cl</a:t>
             </a:r>
           </a:p>
         </p:txBody>

--- a/HueveraMarketing/Super Blanco 100 - Link 1200x628.pptx
+++ b/HueveraMarketing/Super Blanco 100 - Link 1200x628.pptx
@@ -3084,7 +3084,7 @@
     <p:bg>
       <p:bgPr>
         <a:solidFill>
-          <a:srgbClr val="F5C13F"/>
+          <a:srgbClr val="FFFFFF"/>
         </a:solidFill>
         <a:effectLst/>
       </p:bgPr>
@@ -3098,7 +3098,7 @@
       <p:grpSpPr/>
       <p:pic>
         <p:nvPicPr>
-          <p:cNvPr id="2" name="Picture 1" descr="sb_wide_r3667658x4572000_center.png"/>
+          <p:cNvPr id="2" name="Picture 1" descr="sb_tw.png"/>
           <p:cNvPicPr>
             <a:picLocks noChangeAspect="1"/>
           </p:cNvPicPr>
@@ -3112,8 +3112,8 @@
         </p:blipFill>
         <p:spPr>
           <a:xfrm>
-            <a:off x="0" y="0"/>
-            <a:ext cx="3667658" cy="4572000"/>
+            <a:off x="0" y="-150982"/>
+            <a:ext cx="8732520" cy="4873964"/>
           </a:xfrm>
           <a:prstGeom prst="rect">
             <a:avLst/>
@@ -3122,13 +3122,125 @@
       </p:pic>
       <p:sp>
         <p:nvSpPr>
-          <p:cNvPr id="3" name="Rounded Rectangle 2"/>
+          <p:cNvPr id="3" name="Rectangle 2"/>
           <p:cNvSpPr/>
           <p:nvPr/>
         </p:nvSpPr>
         <p:spPr>
           <a:xfrm>
-            <a:off x="4170578" y="822960"/>
+            <a:off x="0" y="0"/>
+            <a:ext cx="8732520" cy="2926080"/>
+          </a:xfrm>
+          <a:prstGeom prst="rect">
+            <a:avLst/>
+          </a:prstGeom>
+          <a:gradFill>
+            <a:gsLst>
+              <a:gs pos="0">
+                <a:srgbClr val="14181F">
+                  <a:alpha val="82000"/>
+                </a:srgbClr>
+              </a:gs>
+              <a:gs pos="100000">
+                <a:srgbClr val="14181F">
+                  <a:alpha val="0"/>
+                </a:srgbClr>
+              </a:gs>
+            </a:gsLst>
+            <a:lin ang="5400000" scaled="1"/>
+          </a:gradFill>
+          <a:ln>
+            <a:noFill/>
+          </a:ln>
+          <a:effectLst/>
+        </p:spPr>
+        <p:style>
+          <a:lnRef idx="1">
+            <a:schemeClr val="accent1"/>
+          </a:lnRef>
+          <a:fillRef idx="3">
+            <a:schemeClr val="accent1"/>
+          </a:fillRef>
+          <a:effectRef idx="2">
+            <a:schemeClr val="accent1"/>
+          </a:effectRef>
+          <a:fontRef idx="minor">
+            <a:schemeClr val="lt1"/>
+          </a:fontRef>
+        </p:style>
+        <p:txBody>
+          <a:bodyPr rtlCol="0" anchor="ctr"/>
+          <a:lstStyle/>
+          <a:p>
+            <a:pPr algn="ctr"/>
+          </a:p>
+        </p:txBody>
+      </p:sp>
+      <p:sp>
+        <p:nvSpPr>
+          <p:cNvPr id="4" name="Rectangle 3"/>
+          <p:cNvSpPr/>
+          <p:nvPr/>
+        </p:nvSpPr>
+        <p:spPr>
+          <a:xfrm>
+            <a:off x="0" y="3200400"/>
+            <a:ext cx="8732520" cy="1371600"/>
+          </a:xfrm>
+          <a:prstGeom prst="rect">
+            <a:avLst/>
+          </a:prstGeom>
+          <a:gradFill>
+            <a:gsLst>
+              <a:gs pos="0">
+                <a:srgbClr val="14181F">
+                  <a:alpha val="0"/>
+                </a:srgbClr>
+              </a:gs>
+              <a:gs pos="100000">
+                <a:srgbClr val="14181F">
+                  <a:alpha val="78000"/>
+                </a:srgbClr>
+              </a:gs>
+            </a:gsLst>
+            <a:lin ang="5400000" scaled="1"/>
+          </a:gradFill>
+          <a:ln>
+            <a:noFill/>
+          </a:ln>
+          <a:effectLst/>
+        </p:spPr>
+        <p:style>
+          <a:lnRef idx="1">
+            <a:schemeClr val="accent1"/>
+          </a:lnRef>
+          <a:fillRef idx="3">
+            <a:schemeClr val="accent1"/>
+          </a:fillRef>
+          <a:effectRef idx="2">
+            <a:schemeClr val="accent1"/>
+          </a:effectRef>
+          <a:fontRef idx="minor">
+            <a:schemeClr val="lt1"/>
+          </a:fontRef>
+        </p:style>
+        <p:txBody>
+          <a:bodyPr rtlCol="0" anchor="ctr"/>
+          <a:lstStyle/>
+          <a:p>
+            <a:pPr algn="ctr"/>
+          </a:p>
+        </p:txBody>
+      </p:sp>
+      <p:sp>
+        <p:nvSpPr>
+          <p:cNvPr id="5" name="Rounded Rectangle 4"/>
+          <p:cNvSpPr/>
+          <p:nvPr/>
+        </p:nvSpPr>
+        <p:spPr>
+          <a:xfrm>
+            <a:off x="777240" y="777240"/>
             <a:ext cx="3024378" cy="373380"/>
           </a:xfrm>
           <a:prstGeom prst="roundRect">
@@ -3137,7 +3249,7 @@
             </a:avLst>
           </a:prstGeom>
           <a:solidFill>
-            <a:srgbClr val="14181F"/>
+            <a:srgbClr val="F5C13F"/>
           </a:solidFill>
           <a:ln>
             <a:noFill/>
@@ -3166,7 +3278,7 @@
             <a:r>
               <a:rPr sz="1500" b="1">
                 <a:solidFill>
-                  <a:srgbClr val="F5C13F"/>
+                  <a:srgbClr val="14181F"/>
                 </a:solidFill>
                 <a:latin typeface="Bricolage Grotesque"/>
               </a:rPr>
@@ -3177,14 +3289,14 @@
       </p:sp>
       <p:sp>
         <p:nvSpPr>
-          <p:cNvPr id="4" name="TextBox 3"/>
+          <p:cNvPr id="6" name="TextBox 5"/>
           <p:cNvSpPr txBox="1"/>
           <p:nvPr/>
         </p:nvSpPr>
         <p:spPr>
           <a:xfrm>
-            <a:off x="4170578" y="1481328"/>
-            <a:ext cx="3784702" cy="1118108"/>
+            <a:off x="777240" y="1435608"/>
+            <a:ext cx="7178040" cy="1245108"/>
           </a:xfrm>
           <a:prstGeom prst="rect">
             <a:avLst/>
@@ -3203,9 +3315,9 @@
               </a:lnSpc>
             </a:pPr>
             <a:r>
-              <a:rPr sz="2600" b="1">
+              <a:rPr sz="3000" b="1">
                 <a:solidFill>
-                  <a:srgbClr val="14181F"/>
+                  <a:srgbClr val="FFFFFF"/>
                 </a:solidFill>
                 <a:latin typeface="Bricolage Grotesque"/>
               </a:rPr>
@@ -3216,14 +3328,14 @@
       </p:sp>
       <p:sp>
         <p:nvSpPr>
-          <p:cNvPr id="5" name="TextBox 4"/>
+          <p:cNvPr id="7" name="TextBox 6"/>
           <p:cNvSpPr txBox="1"/>
           <p:nvPr/>
         </p:nvSpPr>
         <p:spPr>
           <a:xfrm>
-            <a:off x="4170578" y="2599436"/>
-            <a:ext cx="3784702" cy="2581910"/>
+            <a:off x="777240" y="2680716"/>
+            <a:ext cx="7178040" cy="1534159"/>
           </a:xfrm>
           <a:prstGeom prst="rect">
             <a:avLst/>
@@ -3244,14 +3356,61 @@
             <a:r>
               <a:rPr sz="2200" b="0">
                 <a:solidFill>
-                  <a:srgbClr val="14181F"/>
+                  <a:srgbClr val="FFFFFF"/>
                 </a:solidFill>
                 <a:latin typeface="Hanken Grotesk"/>
               </a:rPr>
               <a:t>• 1er despacho gratis
 • Antes de 8:30, llega hoy
-• Refiere y gana $1.000
-huevera.cl</a:t>
+• Refiere y gana $1.000</a:t>
+            </a:r>
+          </a:p>
+        </p:txBody>
+      </p:sp>
+      <p:sp>
+        <p:nvSpPr>
+          <p:cNvPr id="8" name="TextBox 7"/>
+          <p:cNvSpPr txBox="1"/>
+          <p:nvPr/>
+        </p:nvSpPr>
+        <p:spPr>
+          <a:xfrm>
+            <a:off x="777240" y="3611880"/>
+            <a:ext cx="7178040" cy="548640"/>
+          </a:xfrm>
+          <a:prstGeom prst="rect">
+            <a:avLst/>
+          </a:prstGeom>
+          <a:noFill/>
+        </p:spPr>
+        <p:txBody>
+          <a:bodyPr wrap="square" anchor="t" lIns="0" rIns="0" tIns="0" bIns="0">
+            <a:spAutoFit/>
+          </a:bodyPr>
+          <a:lstStyle/>
+          <a:p>
+            <a:pPr algn="l">
+              <a:lnSpc>
+                <a:spcPct val="100000"/>
+              </a:lnSpc>
+            </a:pPr>
+            <a:r>
+              <a:rPr sz="1800" b="1">
+                <a:solidFill>
+                  <a:srgbClr val="F5C13F"/>
+                </a:solidFill>
+                <a:latin typeface="Bricolage Grotesque"/>
+              </a:rPr>
+              <a:t>●  </a:t>
+            </a:r>
+            <a:r>
+              <a:rPr sz="1800" b="1">
+                <a:solidFill>
+                  <a:srgbClr val="FFFFFF"/>
+                </a:solidFill>
+                <a:latin typeface="Bricolage Grotesque"/>
+              </a:rPr>
+              <a:t>Huevera   @huevera.cl</a:t>
             </a:r>
           </a:p>
         </p:txBody>

--- a/HueveraMarketing/Super Blanco 100 - Link 1200x628.pptx
+++ b/HueveraMarketing/Super Blanco 100 - Link 1200x628.pptx
@@ -3129,7 +3129,7 @@
         <p:spPr>
           <a:xfrm>
             <a:off x="0" y="0"/>
-            <a:ext cx="8732520" cy="2926080"/>
+            <a:ext cx="8732520" cy="3383280"/>
           </a:xfrm>
           <a:prstGeom prst="rect">
             <a:avLst/>
@@ -3138,7 +3138,7 @@
             <a:gsLst>
               <a:gs pos="0">
                 <a:srgbClr val="14181F">
-                  <a:alpha val="82000"/>
+                  <a:alpha val="88000"/>
                 </a:srgbClr>
               </a:gs>
               <a:gs pos="100000">
@@ -3178,63 +3178,7 @@
       </p:sp>
       <p:sp>
         <p:nvSpPr>
-          <p:cNvPr id="4" name="Rectangle 3"/>
-          <p:cNvSpPr/>
-          <p:nvPr/>
-        </p:nvSpPr>
-        <p:spPr>
-          <a:xfrm>
-            <a:off x="0" y="3200400"/>
-            <a:ext cx="8732520" cy="1371600"/>
-          </a:xfrm>
-          <a:prstGeom prst="rect">
-            <a:avLst/>
-          </a:prstGeom>
-          <a:gradFill>
-            <a:gsLst>
-              <a:gs pos="0">
-                <a:srgbClr val="14181F">
-                  <a:alpha val="0"/>
-                </a:srgbClr>
-              </a:gs>
-              <a:gs pos="100000">
-                <a:srgbClr val="14181F">
-                  <a:alpha val="78000"/>
-                </a:srgbClr>
-              </a:gs>
-            </a:gsLst>
-            <a:lin ang="5400000" scaled="1"/>
-          </a:gradFill>
-          <a:ln>
-            <a:noFill/>
-          </a:ln>
-          <a:effectLst/>
-        </p:spPr>
-        <p:style>
-          <a:lnRef idx="1">
-            <a:schemeClr val="accent1"/>
-          </a:lnRef>
-          <a:fillRef idx="3">
-            <a:schemeClr val="accent1"/>
-          </a:fillRef>
-          <a:effectRef idx="2">
-            <a:schemeClr val="accent1"/>
-          </a:effectRef>
-          <a:fontRef idx="minor">
-            <a:schemeClr val="lt1"/>
-          </a:fontRef>
-        </p:style>
-        <p:txBody>
-          <a:bodyPr rtlCol="0" anchor="ctr"/>
-          <a:lstStyle/>
-          <a:p>
-            <a:pPr algn="ctr"/>
-          </a:p>
-        </p:txBody>
-      </p:sp>
-      <p:sp>
-        <p:nvSpPr>
-          <p:cNvPr id="5" name="Rounded Rectangle 4"/>
+          <p:cNvPr id="4" name="Rounded Rectangle 3"/>
           <p:cNvSpPr/>
           <p:nvPr/>
         </p:nvSpPr>
@@ -3289,14 +3233,14 @@
       </p:sp>
       <p:sp>
         <p:nvSpPr>
-          <p:cNvPr id="6" name="TextBox 5"/>
+          <p:cNvPr id="5" name="TextBox 4"/>
           <p:cNvSpPr txBox="1"/>
           <p:nvPr/>
         </p:nvSpPr>
         <p:spPr>
           <a:xfrm>
             <a:off x="777240" y="1435608"/>
-            <a:ext cx="7178040" cy="1245108"/>
+            <a:ext cx="7178040" cy="1372108"/>
           </a:xfrm>
           <a:prstGeom prst="rect">
             <a:avLst/>
@@ -3315,7 +3259,7 @@
               </a:lnSpc>
             </a:pPr>
             <a:r>
-              <a:rPr sz="3000" b="1">
+              <a:rPr sz="3400" b="1">
                 <a:solidFill>
                   <a:srgbClr val="FFFFFF"/>
                 </a:solidFill>
@@ -3328,13 +3272,13 @@
       </p:sp>
       <p:sp>
         <p:nvSpPr>
-          <p:cNvPr id="7" name="TextBox 6"/>
+          <p:cNvPr id="6" name="TextBox 5"/>
           <p:cNvSpPr txBox="1"/>
           <p:nvPr/>
         </p:nvSpPr>
         <p:spPr>
           <a:xfrm>
-            <a:off x="777240" y="2680716"/>
+            <a:off x="777240" y="2807716"/>
             <a:ext cx="7178040" cy="1534159"/>
           </a:xfrm>
           <a:prstGeom prst="rect">
@@ -3350,67 +3294,19 @@
           <a:p>
             <a:pPr algn="l">
               <a:lnSpc>
-                <a:spcPct val="110000"/>
+                <a:spcPct val="115000"/>
               </a:lnSpc>
             </a:pPr>
             <a:r>
-              <a:rPr sz="2200" b="0">
-                <a:solidFill>
-                  <a:srgbClr val="FFFFFF"/>
-                </a:solidFill>
-                <a:latin typeface="Hanken Grotesk"/>
-              </a:rPr>
-              <a:t>• 1er despacho gratis
-• Antes de 8:30, llega hoy
-• Refiere y gana $1.000</a:t>
-            </a:r>
-          </a:p>
-        </p:txBody>
-      </p:sp>
-      <p:sp>
-        <p:nvSpPr>
-          <p:cNvPr id="8" name="TextBox 7"/>
-          <p:cNvSpPr txBox="1"/>
-          <p:nvPr/>
-        </p:nvSpPr>
-        <p:spPr>
-          <a:xfrm>
-            <a:off x="777240" y="3611880"/>
-            <a:ext cx="7178040" cy="548640"/>
-          </a:xfrm>
-          <a:prstGeom prst="rect">
-            <a:avLst/>
-          </a:prstGeom>
-          <a:noFill/>
-        </p:spPr>
-        <p:txBody>
-          <a:bodyPr wrap="square" anchor="t" lIns="0" rIns="0" tIns="0" bIns="0">
-            <a:spAutoFit/>
-          </a:bodyPr>
-          <a:lstStyle/>
-          <a:p>
-            <a:pPr algn="l">
-              <a:lnSpc>
-                <a:spcPct val="100000"/>
-              </a:lnSpc>
-            </a:pPr>
-            <a:r>
-              <a:rPr sz="1800" b="1">
-                <a:solidFill>
-                  <a:srgbClr val="F5C13F"/>
-                </a:solidFill>
-                <a:latin typeface="Bricolage Grotesque"/>
-              </a:rPr>
-              <a:t>●  </a:t>
-            </a:r>
-            <a:r>
-              <a:rPr sz="1800" b="1">
+              <a:rPr sz="2200" b="1">
                 <a:solidFill>
                   <a:srgbClr val="FFFFFF"/>
                 </a:solidFill>
                 <a:latin typeface="Bricolage Grotesque"/>
               </a:rPr>
-              <a:t>Huevera   @huevera.cl</a:t>
+              <a:t>• 1er despacho gratis
+• Antes de 8:30, llega hoy
+• Refiere y gana $1.000</a:t>
             </a:r>
           </a:p>
         </p:txBody>
